--- a/assets/pptx/catalog-772.pptx
+++ b/assets/pptx/catalog-772.pptx
@@ -3338,7 +3338,7 @@
                 <a:ea typeface="Ebrima"/>
                 <a:cs typeface="Ebrima"/>
               </a:rPr>
-              <a:t>ጭንቀት ጣርህ ለነፍሴ ይታይ (2x)</a:t>
+              <a:t>ጭንቀት ጣርህ ለነፍሴ ይታይ 2x</a:t>
             </a:r>
           </a:p>
         </p:txBody>
@@ -3807,7 +3807,7 @@
                 <a:ea typeface="Ebrima"/>
                 <a:cs typeface="Ebrima"/>
               </a:rPr>
-              <a:t>ጭንቀት ጣርህ ለነፍሴ ይታይ (2x)</a:t>
+              <a:t>ጭንቀት ጣርህ ለነፍሴ ይታይ 2x</a:t>
             </a:r>
           </a:p>
         </p:txBody>
@@ -4343,7 +4343,7 @@
                 <a:ea typeface="Ebrima"/>
                 <a:cs typeface="Ebrima"/>
               </a:rPr>
-              <a:t>ጭንቀት ጣርህ ለነፍሴ ይታይ (2x)</a:t>
+              <a:t>ጭንቀት ጣርህ ለነፍሴ ይታይ 2x</a:t>
             </a:r>
           </a:p>
         </p:txBody>
@@ -4879,7 +4879,7 @@
                 <a:ea typeface="Ebrima"/>
                 <a:cs typeface="Ebrima"/>
               </a:rPr>
-              <a:t>ጭንቀት ጣርህ ለነፍሴ ይታይ (2x)</a:t>
+              <a:t>ጭንቀት ጣርህ ለነፍሴ ይታይ 2x</a:t>
             </a:r>
           </a:p>
         </p:txBody>
@@ -4946,7 +4946,7 @@
                 <a:ea typeface="Ebrima"/>
                 <a:cs typeface="Ebrima"/>
               </a:rPr>
-              <a:t>ጭንቀት ጣርህ ለነፍሴ ይታይ (2x)</a:t>
+              <a:t>ጭንቀት ጣርህ ለነፍሴ ይታይ 2x</a:t>
             </a:r>
           </a:p>
         </p:txBody>
